--- a/@Materi Kuliah/Materi_Basis_Data/Presentasi_Basis_Data_Profesional_dari_HTML.pptx
+++ b/@Materi Kuliah/Materi_Basis_Data/Presentasi_Basis_Data_Profesional_dari_HTML.pptx
@@ -2,131 +2,36 @@
 <file path=ppt/presentation.xml><?xml version="1.0" encoding="utf-8"?>
 <p:presentation xmlns:p="http://schemas.openxmlformats.org/presentationml/2006/main">
   <p:sldMasterIdLst>
-    <p:sldMasterId xmlns:r="http://schemas.openxmlformats.org/officeDocument/2006/relationships" id="2147483648" r:id="Rc8a92c93d13b437f"/>
+    <p:sldMasterId xmlns:r="http://schemas.openxmlformats.org/officeDocument/2006/relationships" id="2147483648" r:id="Reef6add6a0ce4b81"/>
   </p:sldMasterIdLst>
   <p:notesMasterIdLst>
-    <p:notesMasterId xmlns:r="http://schemas.openxmlformats.org/officeDocument/2006/relationships" r:id="R9e6fc357048a4145"/>
+    <p:notesMasterId xmlns:r="http://schemas.openxmlformats.org/officeDocument/2006/relationships" r:id="R64fe18f6bf7c4d5d"/>
   </p:notesMasterIdLst>
   <p:sldIdLst>
-    <p:sldId xmlns:r="http://schemas.openxmlformats.org/officeDocument/2006/relationships" id="256" r:id="Re0d097e7874442b8"/>
-    <p:sldId xmlns:r="http://schemas.openxmlformats.org/officeDocument/2006/relationships" id="257" r:id="Rf9a004730c3d4120"/>
-    <p:sldId xmlns:r="http://schemas.openxmlformats.org/officeDocument/2006/relationships" id="258" r:id="Re565f845255f4182"/>
-    <p:sldId xmlns:r="http://schemas.openxmlformats.org/officeDocument/2006/relationships" id="259" r:id="Ref0fd55c747c4846"/>
-    <p:sldId xmlns:r="http://schemas.openxmlformats.org/officeDocument/2006/relationships" id="260" r:id="R36259178cf704042"/>
-    <p:sldId xmlns:r="http://schemas.openxmlformats.org/officeDocument/2006/relationships" id="261" r:id="Rc72cf3d0f68c42ca"/>
-    <p:sldId xmlns:r="http://schemas.openxmlformats.org/officeDocument/2006/relationships" id="262" r:id="R8329cfccb0a649a3"/>
-    <p:sldId xmlns:r="http://schemas.openxmlformats.org/officeDocument/2006/relationships" id="263" r:id="R07bb9c67ec5c4750"/>
-    <p:sldId xmlns:r="http://schemas.openxmlformats.org/officeDocument/2006/relationships" id="264" r:id="Rca84c26d52cd41d2"/>
-    <p:sldId xmlns:r="http://schemas.openxmlformats.org/officeDocument/2006/relationships" id="265" r:id="Ra9fe03e0311448d8"/>
-    <p:sldId xmlns:r="http://schemas.openxmlformats.org/officeDocument/2006/relationships" id="266" r:id="R6f0a69c8b494448f"/>
-    <p:sldId xmlns:r="http://schemas.openxmlformats.org/officeDocument/2006/relationships" id="267" r:id="R997ddfd5a73840e6"/>
-    <p:sldId xmlns:r="http://schemas.openxmlformats.org/officeDocument/2006/relationships" id="268" r:id="R01cabf6d5d794e59"/>
-    <p:sldId xmlns:r="http://schemas.openxmlformats.org/officeDocument/2006/relationships" id="269" r:id="R730f347882a0497b"/>
-    <p:sldId xmlns:r="http://schemas.openxmlformats.org/officeDocument/2006/relationships" id="270" r:id="Rf1a48f78a1984721"/>
-    <p:sldId xmlns:r="http://schemas.openxmlformats.org/officeDocument/2006/relationships" id="271" r:id="R15d79a3c82f44211"/>
-    <p:sldId xmlns:r="http://schemas.openxmlformats.org/officeDocument/2006/relationships" id="272" r:id="R301ddf2762324098"/>
-    <p:sldId xmlns:r="http://schemas.openxmlformats.org/officeDocument/2006/relationships" id="273" r:id="R1ac1ac29ad6a4ae3"/>
-    <p:sldId xmlns:r="http://schemas.openxmlformats.org/officeDocument/2006/relationships" id="274" r:id="R28b64bdbabb14c38"/>
-    <p:sldId xmlns:r="http://schemas.openxmlformats.org/officeDocument/2006/relationships" id="275" r:id="Ra9a959f6dd5e405e"/>
-    <p:sldId xmlns:r="http://schemas.openxmlformats.org/officeDocument/2006/relationships" id="276" r:id="R086dd4a19e884108"/>
+    <p:sldId xmlns:r="http://schemas.openxmlformats.org/officeDocument/2006/relationships" id="256" r:id="R2ae2b50d72494ab2"/>
+    <p:sldId xmlns:r="http://schemas.openxmlformats.org/officeDocument/2006/relationships" id="257" r:id="R4ef33b9acef64332"/>
+    <p:sldId xmlns:r="http://schemas.openxmlformats.org/officeDocument/2006/relationships" id="258" r:id="Ra457e0ed513c4c6d"/>
+    <p:sldId xmlns:r="http://schemas.openxmlformats.org/officeDocument/2006/relationships" id="259" r:id="R05431513c2354965"/>
+    <p:sldId xmlns:r="http://schemas.openxmlformats.org/officeDocument/2006/relationships" id="260" r:id="R42061812abfd4e7b"/>
+    <p:sldId xmlns:r="http://schemas.openxmlformats.org/officeDocument/2006/relationships" id="261" r:id="Rf63caf155a13485b"/>
+    <p:sldId xmlns:r="http://schemas.openxmlformats.org/officeDocument/2006/relationships" id="262" r:id="R9d8fc5d7805a4277"/>
+    <p:sldId xmlns:r="http://schemas.openxmlformats.org/officeDocument/2006/relationships" id="263" r:id="R1f321e42d11948c4"/>
+    <p:sldId xmlns:r="http://schemas.openxmlformats.org/officeDocument/2006/relationships" id="264" r:id="R77cd3e8e7fb64cd6"/>
+    <p:sldId xmlns:r="http://schemas.openxmlformats.org/officeDocument/2006/relationships" id="265" r:id="R43499fd967b4451d"/>
+    <p:sldId xmlns:r="http://schemas.openxmlformats.org/officeDocument/2006/relationships" id="266" r:id="R921f3bbe542e46ad"/>
+    <p:sldId xmlns:r="http://schemas.openxmlformats.org/officeDocument/2006/relationships" id="267" r:id="R55ae3fb9cf504031"/>
+    <p:sldId xmlns:r="http://schemas.openxmlformats.org/officeDocument/2006/relationships" id="268" r:id="R6bfc3bc9194a41f7"/>
+    <p:sldId xmlns:r="http://schemas.openxmlformats.org/officeDocument/2006/relationships" id="269" r:id="Rb3b40225119e4329"/>
+    <p:sldId xmlns:r="http://schemas.openxmlformats.org/officeDocument/2006/relationships" id="270" r:id="Rfd15bdb238ef4b10"/>
+    <p:sldId xmlns:r="http://schemas.openxmlformats.org/officeDocument/2006/relationships" id="271" r:id="R82dfd1134b614980"/>
+    <p:sldId xmlns:r="http://schemas.openxmlformats.org/officeDocument/2006/relationships" id="272" r:id="Ra273a636954e4669"/>
+    <p:sldId xmlns:r="http://schemas.openxmlformats.org/officeDocument/2006/relationships" id="273" r:id="R67f15b776c7a4ef9"/>
+    <p:sldId xmlns:r="http://schemas.openxmlformats.org/officeDocument/2006/relationships" id="274" r:id="R7dc812721231422c"/>
+    <p:sldId xmlns:r="http://schemas.openxmlformats.org/officeDocument/2006/relationships" id="275" r:id="R840078346f9b4f44"/>
+    <p:sldId xmlns:r="http://schemas.openxmlformats.org/officeDocument/2006/relationships" id="276" r:id="R84d65469d2b94aeb"/>
   </p:sldIdLst>
   <p:sldSz cx="12192000" cy="6858000"/>
   <p:notesSz cx="6858000" cy="9144000"/>
-  <p:defaultTextStyle>
-    <a:defPPr xmlns:a="http://schemas.openxmlformats.org/drawingml/2006/main">
-      <a:defRPr lang="en-US"/>
-    </a:defPPr>
-    <a:lvl1pPr xmlns:a="http://schemas.openxmlformats.org/drawingml/2006/main" marL="0" indent="0" algn="l" defTabSz="914400">
-      <a:defRPr sz="1800" kern="1200">
-        <a:solidFill>
-          <a:schemeClr val="tx1"/>
-        </a:solidFill>
-        <a:latin typeface="+mn-lt"/>
-        <a:ea typeface="+mn-ea"/>
-        <a:cs typeface="+mn-cs"/>
-      </a:defRPr>
-    </a:lvl1pPr>
-    <a:lvl2pPr xmlns:a="http://schemas.openxmlformats.org/drawingml/2006/main" marL="457200" indent="0" algn="l" defTabSz="914400">
-      <a:defRPr sz="1800" kern="1200">
-        <a:solidFill>
-          <a:schemeClr val="tx1"/>
-        </a:solidFill>
-        <a:latin typeface="+mn-lt"/>
-        <a:ea typeface="+mn-ea"/>
-        <a:cs typeface="+mn-cs"/>
-      </a:defRPr>
-    </a:lvl2pPr>
-    <a:lvl3pPr xmlns:a="http://schemas.openxmlformats.org/drawingml/2006/main" marL="914400" indent="0" algn="l" defTabSz="914400">
-      <a:defRPr sz="1800" kern="1200">
-        <a:solidFill>
-          <a:schemeClr val="tx1"/>
-        </a:solidFill>
-        <a:latin typeface="+mn-lt"/>
-        <a:ea typeface="+mn-ea"/>
-        <a:cs typeface="+mn-cs"/>
-      </a:defRPr>
-    </a:lvl3pPr>
-    <a:lvl4pPr xmlns:a="http://schemas.openxmlformats.org/drawingml/2006/main" marL="1371600" indent="0" algn="l" defTabSz="914400">
-      <a:defRPr sz="1800" kern="1200">
-        <a:solidFill>
-          <a:schemeClr val="tx1"/>
-        </a:solidFill>
-        <a:latin typeface="+mn-lt"/>
-        <a:ea typeface="+mn-ea"/>
-        <a:cs typeface="+mn-cs"/>
-      </a:defRPr>
-    </a:lvl4pPr>
-    <a:lvl5pPr xmlns:a="http://schemas.openxmlformats.org/drawingml/2006/main" marL="1828800" indent="0" algn="l" defTabSz="914400">
-      <a:defRPr sz="1800" kern="1200">
-        <a:solidFill>
-          <a:schemeClr val="tx1"/>
-        </a:solidFill>
-        <a:latin typeface="+mn-lt"/>
-        <a:ea typeface="+mn-ea"/>
-        <a:cs typeface="+mn-cs"/>
-      </a:defRPr>
-    </a:lvl5pPr>
-    <a:lvl6pPr xmlns:a="http://schemas.openxmlformats.org/drawingml/2006/main" marL="2286000" indent="0" algn="l" defTabSz="914400">
-      <a:defRPr sz="1800" kern="1200">
-        <a:solidFill>
-          <a:schemeClr val="tx1"/>
-        </a:solidFill>
-        <a:latin typeface="+mn-lt"/>
-        <a:ea typeface="+mn-ea"/>
-        <a:cs typeface="+mn-cs"/>
-      </a:defRPr>
-    </a:lvl6pPr>
-    <a:lvl7pPr xmlns:a="http://schemas.openxmlformats.org/drawingml/2006/main" marL="2743200" indent="0" algn="l" defTabSz="914400">
-      <a:defRPr sz="1800" kern="1200">
-        <a:solidFill>
-          <a:schemeClr val="tx1"/>
-        </a:solidFill>
-        <a:latin typeface="+mn-lt"/>
-        <a:ea typeface="+mn-ea"/>
-        <a:cs typeface="+mn-cs"/>
-      </a:defRPr>
-    </a:lvl7pPr>
-    <a:lvl8pPr xmlns:a="http://schemas.openxmlformats.org/drawingml/2006/main" marL="3200400" indent="0" algn="l" defTabSz="914400">
-      <a:defRPr sz="1800" kern="1200">
-        <a:solidFill>
-          <a:schemeClr val="tx1"/>
-        </a:solidFill>
-        <a:latin typeface="+mn-lt"/>
-        <a:ea typeface="+mn-ea"/>
-        <a:cs typeface="+mn-cs"/>
-      </a:defRPr>
-    </a:lvl8pPr>
-    <a:lvl9pPr xmlns:a="http://schemas.openxmlformats.org/drawingml/2006/main" marL="3657600" indent="0" algn="l" defTabSz="914400">
-      <a:defRPr sz="1800" kern="1200">
-        <a:solidFill>
-          <a:schemeClr val="tx1"/>
-        </a:solidFill>
-        <a:latin typeface="+mn-lt"/>
-        <a:ea typeface="+mn-ea"/>
-        <a:cs typeface="+mn-cs"/>
-      </a:defRPr>
-    </a:lvl9pPr>
-  </p:defaultTextStyle>
 </p:presentation>
 </file>
 
@@ -1453,7 +1358,26 @@
         <p:txBody>
           <a:bodyPr xmlns:a="http://schemas.openxmlformats.org/drawingml/2006/main"/>
           <a:lstStyle xmlns:a="http://schemas.openxmlformats.org/drawingml/2006/main"/>
-          <a:p xmlns:a="http://schemas.openxmlformats.org/drawingml/2006/main"/>
+          <a:p xmlns:a="http://schemas.openxmlformats.org/drawingml/2006/main">
+            <a:r>
+              <a:t>[Sources]</a:t>
+            </a:r>
+          </a:p>
+          <a:p xmlns:a="http://schemas.openxmlformats.org/drawingml/2006/main">
+            <a:r>
+              <a:t>- RPS mata kuliah Revisi AI 2026, Program Studi S2 Statistika Terapan FMIPA Universitas Padjadjaran.</a:t>
+            </a:r>
+          </a:p>
+          <a:p xmlns:a="http://schemas.openxmlformats.org/drawingml/2006/main">
+            <a:r>
+              <a:t>[/Sources]</a:t>
+            </a:r>
+          </a:p>
+          <a:p xmlns:a="http://schemas.openxmlformats.org/drawingml/2006/main">
+            <a:r>
+              <a:t>Penutup: CPL tetap. AI adalah akselerator ketercapaian CPMK/Sub-CPMK, bukan pengganti penalaran statistika. Tekankan kewajiban prompt log ringkas, sumber, kode/notebook reproducible, validasi, dan audit trail.</a:t>
+            </a:r>
+          </a:p>
         </p:txBody>
       </p:sp>
       <p:sp>
@@ -2010,8 +1934,8 @@
   </p:cSld>
   <p:clrMap bg1="lt1" tx1="dk1" bg2="lt2" tx2="dk2" accent1="accent1" accent2="accent2" accent3="accent3" accent4="accent4" accent5="accent5" accent6="accent6" hlink="hlink" folHlink="folHlink"/>
   <p:sldLayoutIdLst>
-    <p:sldLayoutId xmlns:r="http://schemas.openxmlformats.org/officeDocument/2006/relationships" id="2147483649" r:id="R4fe5a688424f410b"/>
-    <p:sldLayoutId xmlns:r="http://schemas.openxmlformats.org/officeDocument/2006/relationships" id="2147483650" r:id="R3f7b83009d8742da"/>
+    <p:sldLayoutId xmlns:r="http://schemas.openxmlformats.org/officeDocument/2006/relationships" id="2147483649" r:id="R277bd196fd274deb"/>
+    <p:sldLayoutId xmlns:r="http://schemas.openxmlformats.org/officeDocument/2006/relationships" id="2147483650" r:id="Rcd0b4c83ab064e52"/>
   </p:sldLayoutIdLst>
   <p:hf sldNum="0" hdr="0" ftr="0" dt="0"/>
   <p:txStyles>
@@ -2577,7 +2501,7 @@
           <p:nvPr/>
         </p:nvPicPr>
         <p:blipFill>
-          <a:blip xmlns:r="http://schemas.openxmlformats.org/officeDocument/2006/relationships" xmlns:a="http://schemas.openxmlformats.org/drawingml/2006/main" r:embed="R2423471801a24077"/>
+          <a:blip xmlns:r="http://schemas.openxmlformats.org/officeDocument/2006/relationships" xmlns:a="http://schemas.openxmlformats.org/drawingml/2006/main" r:embed="R2ea02c6bf7b142a8"/>
           <a:stretch xmlns:a="http://schemas.openxmlformats.org/drawingml/2006/main">
             <a:fillRect l="0" t="0" r="0" b="0"/>
           </a:stretch>
@@ -2723,7 +2647,7 @@
           <p:nvPr/>
         </p:nvPicPr>
         <p:blipFill>
-          <a:blip xmlns:r="http://schemas.openxmlformats.org/officeDocument/2006/relationships" xmlns:a="http://schemas.openxmlformats.org/drawingml/2006/main" r:embed="R10b93a8af4794bb0"/>
+          <a:blip xmlns:r="http://schemas.openxmlformats.org/officeDocument/2006/relationships" xmlns:a="http://schemas.openxmlformats.org/drawingml/2006/main" r:embed="R5d22919960f44a7f"/>
           <a:stretch xmlns:a="http://schemas.openxmlformats.org/drawingml/2006/main">
             <a:fillRect l="0" t="0" r="0" b="0"/>
           </a:stretch>
@@ -3329,7 +3253,7 @@
           <p:nvPr/>
         </p:nvPicPr>
         <p:blipFill>
-          <a:blip xmlns:r="http://schemas.openxmlformats.org/officeDocument/2006/relationships" xmlns:a="http://schemas.openxmlformats.org/drawingml/2006/main" r:embed="Rb73fed4fe1a3482b"/>
+          <a:blip xmlns:r="http://schemas.openxmlformats.org/officeDocument/2006/relationships" xmlns:a="http://schemas.openxmlformats.org/drawingml/2006/main" r:embed="R6ea18ced748d4a81"/>
           <a:stretch xmlns:a="http://schemas.openxmlformats.org/drawingml/2006/main">
             <a:fillRect l="0" t="0" r="0" b="0"/>
           </a:stretch>
@@ -5479,7 +5403,7 @@
           <p:nvPr/>
         </p:nvPicPr>
         <p:blipFill>
-          <a:blip xmlns:r="http://schemas.openxmlformats.org/officeDocument/2006/relationships" xmlns:a="http://schemas.openxmlformats.org/drawingml/2006/main" r:embed="R5e9c7e2a37584c00"/>
+          <a:blip xmlns:r="http://schemas.openxmlformats.org/officeDocument/2006/relationships" xmlns:a="http://schemas.openxmlformats.org/drawingml/2006/main" r:embed="Rd817ada754e94d8c"/>
           <a:stretch xmlns:a="http://schemas.openxmlformats.org/drawingml/2006/main">
             <a:fillRect l="0" t="0" r="0" b="0"/>
           </a:stretch>
@@ -5758,7 +5682,7 @@
           <p:nvPr/>
         </p:nvPicPr>
         <p:blipFill>
-          <a:blip xmlns:r="http://schemas.openxmlformats.org/officeDocument/2006/relationships" xmlns:a="http://schemas.openxmlformats.org/drawingml/2006/main" r:embed="R667f4ede4633452b"/>
+          <a:blip xmlns:r="http://schemas.openxmlformats.org/officeDocument/2006/relationships" xmlns:a="http://schemas.openxmlformats.org/drawingml/2006/main" r:embed="Rf1c071b103964df8"/>
           <a:stretch xmlns:a="http://schemas.openxmlformats.org/drawingml/2006/main">
             <a:fillRect l="0" t="0" r="0" b="0"/>
           </a:stretch>
@@ -7292,7 +7216,7 @@
           <p:nvPr/>
         </p:nvPicPr>
         <p:blipFill>
-          <a:blip xmlns:r="http://schemas.openxmlformats.org/officeDocument/2006/relationships" xmlns:a="http://schemas.openxmlformats.org/drawingml/2006/main" r:embed="Rb31d1dd521584d67"/>
+          <a:blip xmlns:r="http://schemas.openxmlformats.org/officeDocument/2006/relationships" xmlns:a="http://schemas.openxmlformats.org/drawingml/2006/main" r:embed="R78ba0fd274cf4f26"/>
           <a:stretch xmlns:a="http://schemas.openxmlformats.org/drawingml/2006/main">
             <a:fillRect l="0" t="0" r="0" b="0"/>
           </a:stretch>
@@ -8461,7 +8385,7 @@
           <p:nvPr/>
         </p:nvPicPr>
         <p:blipFill>
-          <a:blip xmlns:r="http://schemas.openxmlformats.org/officeDocument/2006/relationships" xmlns:a="http://schemas.openxmlformats.org/drawingml/2006/main" r:embed="R42edd90d93df4a75"/>
+          <a:blip xmlns:r="http://schemas.openxmlformats.org/officeDocument/2006/relationships" xmlns:a="http://schemas.openxmlformats.org/drawingml/2006/main" r:embed="R78f5f1b7750b4877"/>
           <a:stretch xmlns:a="http://schemas.openxmlformats.org/drawingml/2006/main">
             <a:fillRect l="0" t="0" r="0" b="0"/>
           </a:stretch>
@@ -9688,7 +9612,7 @@
           <p:nvPr/>
         </p:nvPicPr>
         <p:blipFill>
-          <a:blip xmlns:r="http://schemas.openxmlformats.org/officeDocument/2006/relationships" xmlns:a="http://schemas.openxmlformats.org/drawingml/2006/main" r:embed="R90f4089950244834"/>
+          <a:blip xmlns:r="http://schemas.openxmlformats.org/officeDocument/2006/relationships" xmlns:a="http://schemas.openxmlformats.org/drawingml/2006/main" r:embed="R485069db88764a0c"/>
           <a:stretch xmlns:a="http://schemas.openxmlformats.org/drawingml/2006/main">
             <a:fillRect l="0" t="0" r="0" b="0"/>
           </a:stretch>
@@ -10893,7 +10817,7 @@
           <p:nvPr/>
         </p:nvPicPr>
         <p:blipFill>
-          <a:blip xmlns:r="http://schemas.openxmlformats.org/officeDocument/2006/relationships" xmlns:a="http://schemas.openxmlformats.org/drawingml/2006/main" r:embed="Ra6a466b766b94c96"/>
+          <a:blip xmlns:r="http://schemas.openxmlformats.org/officeDocument/2006/relationships" xmlns:a="http://schemas.openxmlformats.org/drawingml/2006/main" r:embed="R1b39ec7f10334d0e"/>
           <a:stretch xmlns:a="http://schemas.openxmlformats.org/drawingml/2006/main">
             <a:fillRect l="0" t="0" r="0" b="0"/>
           </a:stretch>
@@ -11172,7 +11096,7 @@
           <p:nvPr/>
         </p:nvPicPr>
         <p:blipFill>
-          <a:blip xmlns:r="http://schemas.openxmlformats.org/officeDocument/2006/relationships" xmlns:a="http://schemas.openxmlformats.org/drawingml/2006/main" r:embed="Rc69cc9132d8e4df9"/>
+          <a:blip xmlns:r="http://schemas.openxmlformats.org/officeDocument/2006/relationships" xmlns:a="http://schemas.openxmlformats.org/drawingml/2006/main" r:embed="Rdf10c6a9e70a4fc0"/>
           <a:stretch xmlns:a="http://schemas.openxmlformats.org/drawingml/2006/main">
             <a:fillRect l="0" t="0" r="0" b="0"/>
           </a:stretch>
@@ -12717,7 +12641,7 @@
           <p:nvPr/>
         </p:nvPicPr>
         <p:blipFill>
-          <a:blip xmlns:r="http://schemas.openxmlformats.org/officeDocument/2006/relationships" xmlns:a="http://schemas.openxmlformats.org/drawingml/2006/main" r:embed="R19e0b6e851e34f12"/>
+          <a:blip xmlns:r="http://schemas.openxmlformats.org/officeDocument/2006/relationships" xmlns:a="http://schemas.openxmlformats.org/drawingml/2006/main" r:embed="R180311229c9c47ca"/>
           <a:stretch xmlns:a="http://schemas.openxmlformats.org/drawingml/2006/main">
             <a:fillRect l="0" t="0" r="0" b="0"/>
           </a:stretch>
@@ -14734,7 +14658,7 @@
           <p:nvPr/>
         </p:nvPicPr>
         <p:blipFill>
-          <a:blip xmlns:r="http://schemas.openxmlformats.org/officeDocument/2006/relationships" xmlns:a="http://schemas.openxmlformats.org/drawingml/2006/main" r:embed="R9ff57b502173423e"/>
+          <a:blip xmlns:r="http://schemas.openxmlformats.org/officeDocument/2006/relationships" xmlns:a="http://schemas.openxmlformats.org/drawingml/2006/main" r:embed="Rd68fc47302324c20"/>
           <a:stretch xmlns:a="http://schemas.openxmlformats.org/drawingml/2006/main">
             <a:fillRect l="0" t="0" r="0" b="0"/>
           </a:stretch>
@@ -15961,7 +15885,7 @@
           <p:nvPr/>
         </p:nvPicPr>
         <p:blipFill>
-          <a:blip xmlns:r="http://schemas.openxmlformats.org/officeDocument/2006/relationships" xmlns:a="http://schemas.openxmlformats.org/drawingml/2006/main" r:embed="Re511747c7c784399"/>
+          <a:blip xmlns:r="http://schemas.openxmlformats.org/officeDocument/2006/relationships" xmlns:a="http://schemas.openxmlformats.org/drawingml/2006/main" r:embed="R87876a2aca8a48e9"/>
           <a:stretch xmlns:a="http://schemas.openxmlformats.org/drawingml/2006/main">
             <a:fillRect l="0" t="0" r="0" b="0"/>
           </a:stretch>
@@ -17102,7 +17026,7 @@
           <p:nvPr/>
         </p:nvPicPr>
         <p:blipFill>
-          <a:blip xmlns:r="http://schemas.openxmlformats.org/officeDocument/2006/relationships" xmlns:a="http://schemas.openxmlformats.org/drawingml/2006/main" r:embed="Rdaa103fa56194e48"/>
+          <a:blip xmlns:r="http://schemas.openxmlformats.org/officeDocument/2006/relationships" xmlns:a="http://schemas.openxmlformats.org/drawingml/2006/main" r:embed="Raeaa7cc295b3484f"/>
           <a:stretch xmlns:a="http://schemas.openxmlformats.org/drawingml/2006/main">
             <a:fillRect l="0" t="0" r="0" b="0"/>
           </a:stretch>
@@ -18567,7 +18491,7 @@
           <p:nvPr/>
         </p:nvPicPr>
         <p:blipFill>
-          <a:blip xmlns:r="http://schemas.openxmlformats.org/officeDocument/2006/relationships" xmlns:a="http://schemas.openxmlformats.org/drawingml/2006/main" r:embed="Rb8fb249e7fd94669"/>
+          <a:blip xmlns:r="http://schemas.openxmlformats.org/officeDocument/2006/relationships" xmlns:a="http://schemas.openxmlformats.org/drawingml/2006/main" r:embed="Rcfdc663487dc4838"/>
           <a:stretch xmlns:a="http://schemas.openxmlformats.org/drawingml/2006/main">
             <a:fillRect l="0" t="0" r="0" b="0"/>
           </a:stretch>
@@ -18713,7 +18637,7 @@
           <p:nvPr/>
         </p:nvPicPr>
         <p:blipFill>
-          <a:blip xmlns:r="http://schemas.openxmlformats.org/officeDocument/2006/relationships" xmlns:a="http://schemas.openxmlformats.org/drawingml/2006/main" r:embed="R0e142d4a8c074a70"/>
+          <a:blip xmlns:r="http://schemas.openxmlformats.org/officeDocument/2006/relationships" xmlns:a="http://schemas.openxmlformats.org/drawingml/2006/main" r:embed="R247807c76d6f4ecd"/>
           <a:stretch xmlns:a="http://schemas.openxmlformats.org/drawingml/2006/main">
             <a:fillRect l="0" t="0" r="0" b="0"/>
           </a:stretch>
@@ -18817,7 +18741,7 @@
                 <a:ea typeface="Aptos Display"/>
                 <a:cs typeface="Aptos Display"/>
               </a:rPr>
-              <a:t>Dari data menuju</a:t>
+              <a:t>AI mempercepat proses,</a:t>
             </a:r>
           </a:p>
           <a:p xmlns:a="http://schemas.openxmlformats.org/drawingml/2006/main">
@@ -18833,7 +18757,7 @@
                 <a:ea typeface="Aptos Display"/>
                 <a:cs typeface="Aptos Display"/>
               </a:rPr>
-              <a:t>keputusan yang dapat diuji</a:t>
+              <a:t>penalaran tetap memimpin</a:t>
             </a:r>
           </a:p>
         </p:txBody>
@@ -18900,7 +18824,7 @@
         </p:spPr>
         <p:txBody>
           <a:bodyPr xmlns:a="http://schemas.openxmlformats.org/drawingml/2006/main" wrap="square" lIns="635" tIns="635" rIns="635" bIns="635" anchor="t">
-            <a:normAutofit fontScale="100000"/>
+            <a:normAutofit fontScale="93620"/>
           </a:bodyPr>
           <a:lstStyle xmlns:a="http://schemas.openxmlformats.org/drawingml/2006/main"/>
           <a:p xmlns:a="http://schemas.openxmlformats.org/drawingml/2006/main">
@@ -18916,7 +18840,7 @@
                 <a:ea typeface="Aptos"/>
                 <a:cs typeface="Aptos"/>
               </a:rPr>
-              <a:t>Basis Data menghubungkan teori, data, metode, validasi, dan komunikasi untuk menghasilkan keputusan yang sahih, dapat direplikasi, dan bertanggung jawab.</a:t>
+              <a:t>Basis Data memadukan teori, data, komputasi, validasi, dan komunikasi. AI mempercepat eksplorasi dan pemeriksaan awal; mahasiswa tetap memverifikasi asumsi, kode, hasil numerik, ketidakpastian, sumber, dan dampak sebelum mengambil keputusan.</a:t>
             </a:r>
           </a:p>
         </p:txBody>
@@ -19086,7 +19010,7 @@
           <p:nvPr/>
         </p:nvPicPr>
         <p:blipFill>
-          <a:blip xmlns:r="http://schemas.openxmlformats.org/officeDocument/2006/relationships" xmlns:a="http://schemas.openxmlformats.org/drawingml/2006/main" r:embed="Rd28eb82282fb475c"/>
+          <a:blip xmlns:r="http://schemas.openxmlformats.org/officeDocument/2006/relationships" xmlns:a="http://schemas.openxmlformats.org/drawingml/2006/main" r:embed="R95ca294c31834f63"/>
           <a:stretch xmlns:a="http://schemas.openxmlformats.org/drawingml/2006/main">
             <a:fillRect l="0" t="0" r="0" b="0"/>
           </a:stretch>
@@ -20217,7 +20141,7 @@
           <p:nvPr/>
         </p:nvPicPr>
         <p:blipFill>
-          <a:blip xmlns:r="http://schemas.openxmlformats.org/officeDocument/2006/relationships" xmlns:a="http://schemas.openxmlformats.org/drawingml/2006/main" r:embed="Rb8a2363ca092452b"/>
+          <a:blip xmlns:r="http://schemas.openxmlformats.org/officeDocument/2006/relationships" xmlns:a="http://schemas.openxmlformats.org/drawingml/2006/main" r:embed="R17a6914c97464132"/>
           <a:stretch xmlns:a="http://schemas.openxmlformats.org/drawingml/2006/main">
             <a:fillRect l="0" t="0" r="0" b="0"/>
           </a:stretch>
@@ -22321,7 +22245,7 @@
           <p:nvPr/>
         </p:nvPicPr>
         <p:blipFill>
-          <a:blip xmlns:r="http://schemas.openxmlformats.org/officeDocument/2006/relationships" xmlns:a="http://schemas.openxmlformats.org/drawingml/2006/main" r:embed="R40439265ce1a4191"/>
+          <a:blip xmlns:r="http://schemas.openxmlformats.org/officeDocument/2006/relationships" xmlns:a="http://schemas.openxmlformats.org/drawingml/2006/main" r:embed="Rd3e51c7c4abd4d8f"/>
           <a:stretch xmlns:a="http://schemas.openxmlformats.org/drawingml/2006/main">
             <a:fillRect l="0" t="0" r="0" b="0"/>
           </a:stretch>
@@ -23603,7 +23527,7 @@
           <p:nvPr/>
         </p:nvPicPr>
         <p:blipFill>
-          <a:blip xmlns:r="http://schemas.openxmlformats.org/officeDocument/2006/relationships" xmlns:a="http://schemas.openxmlformats.org/drawingml/2006/main" r:embed="R9d98d538ad834763"/>
+          <a:blip xmlns:r="http://schemas.openxmlformats.org/officeDocument/2006/relationships" xmlns:a="http://schemas.openxmlformats.org/drawingml/2006/main" r:embed="R475a9d6bd6194388"/>
           <a:stretch xmlns:a="http://schemas.openxmlformats.org/drawingml/2006/main">
             <a:fillRect l="0" t="0" r="0" b="0"/>
           </a:stretch>
@@ -23882,7 +23806,7 @@
           <p:nvPr/>
         </p:nvPicPr>
         <p:blipFill>
-          <a:blip xmlns:r="http://schemas.openxmlformats.org/officeDocument/2006/relationships" xmlns:a="http://schemas.openxmlformats.org/drawingml/2006/main" r:embed="Re1dbd931b823447d"/>
+          <a:blip xmlns:r="http://schemas.openxmlformats.org/officeDocument/2006/relationships" xmlns:a="http://schemas.openxmlformats.org/drawingml/2006/main" r:embed="R646e66ee118f4ee1"/>
           <a:stretch xmlns:a="http://schemas.openxmlformats.org/drawingml/2006/main">
             <a:fillRect l="0" t="0" r="0" b="0"/>
           </a:stretch>
@@ -25962,7 +25886,7 @@
           <p:nvPr/>
         </p:nvPicPr>
         <p:blipFill>
-          <a:blip xmlns:r="http://schemas.openxmlformats.org/officeDocument/2006/relationships" xmlns:a="http://schemas.openxmlformats.org/drawingml/2006/main" r:embed="Rea8b61df37764e64"/>
+          <a:blip xmlns:r="http://schemas.openxmlformats.org/officeDocument/2006/relationships" xmlns:a="http://schemas.openxmlformats.org/drawingml/2006/main" r:embed="Rd40f8c15a2fe4fdb"/>
           <a:stretch xmlns:a="http://schemas.openxmlformats.org/drawingml/2006/main">
             <a:fillRect l="0" t="0" r="0" b="0"/>
           </a:stretch>
@@ -27375,7 +27299,7 @@
           <p:nvPr/>
         </p:nvPicPr>
         <p:blipFill>
-          <a:blip xmlns:r="http://schemas.openxmlformats.org/officeDocument/2006/relationships" xmlns:a="http://schemas.openxmlformats.org/drawingml/2006/main" r:embed="R5a969cfc498a461c"/>
+          <a:blip xmlns:r="http://schemas.openxmlformats.org/officeDocument/2006/relationships" xmlns:a="http://schemas.openxmlformats.org/drawingml/2006/main" r:embed="Rf6b822a658ff414e"/>
           <a:stretch xmlns:a="http://schemas.openxmlformats.org/drawingml/2006/main">
             <a:fillRect l="0" t="0" r="0" b="0"/>
           </a:stretch>
